--- a/Презентация_Пятый_элемент.pptx
+++ b/Презентация_Пятый_элемент.pptx
@@ -16205,14 +16205,20 @@
           <a:lstStyle/>
           <a:p>
             <a:r>
-              <a:rPr lang="ru-RU" sz="1500" b="1">
+              <a:rPr lang="en-US" sz="1500" b="1" dirty="0">
                 <a:solidFill>
                   <a:srgbClr val="FFFFFF"/>
                 </a:solidFill>
                 <a:latin typeface="Arial" panose="020B0604020202020204" pitchFamily="34" charset="0"/>
               </a:rPr>
-              <a:t>[ссылка на репозиторий]</a:t>
-            </a:r>
+              <a:t>https://github.com/Shararamoshik/sozvon/tree/main</a:t>
+            </a:r>
+            <a:endParaRPr lang="ru-RU" sz="1500" b="1" dirty="0">
+              <a:solidFill>
+                <a:srgbClr val="FFFFFF"/>
+              </a:solidFill>
+              <a:latin typeface="Arial" panose="020B0604020202020204" pitchFamily="34" charset="0"/>
+            </a:endParaRPr>
           </a:p>
         </p:txBody>
       </p:sp>
@@ -20367,65 +20373,6 @@
       </p:pic>
       <p:pic>
         <p:nvPicPr>
-          <p:cNvPr id="42" name="Рисунок 41">
-            <a:extLst>
-              <a:ext uri="{FF2B5EF4-FFF2-40B4-BE49-F238E27FC236}">
-                <a16:creationId xmlns:a16="http://schemas.microsoft.com/office/drawing/2014/main" id="{05EE0E35-1C5B-790D-0B8C-7841E80DFA86}"/>
-              </a:ext>
-            </a:extLst>
-          </p:cNvPr>
-          <p:cNvPicPr>
-            <a:picLocks noChangeAspect="1"/>
-          </p:cNvPicPr>
-          <p:nvPr/>
-        </p:nvPicPr>
-        <p:blipFill>
-          <a:blip r:embed="rId4"/>
-          <a:srcRect t="27499"/>
-          <a:stretch/>
-        </p:blipFill>
-        <p:spPr>
-          <a:xfrm>
-            <a:off x="3396577" y="1646867"/>
-            <a:ext cx="2676488" cy="2680924"/>
-          </a:xfrm>
-          <a:prstGeom prst="rect">
-            <a:avLst/>
-          </a:prstGeom>
-        </p:spPr>
-      </p:pic>
-      <p:pic>
-        <p:nvPicPr>
-          <p:cNvPr id="45" name="Рисунок 44">
-            <a:extLst>
-              <a:ext uri="{FF2B5EF4-FFF2-40B4-BE49-F238E27FC236}">
-                <a16:creationId xmlns:a16="http://schemas.microsoft.com/office/drawing/2014/main" id="{659525BB-BEF9-E75E-4F99-6D5F781CDF30}"/>
-              </a:ext>
-            </a:extLst>
-          </p:cNvPr>
-          <p:cNvPicPr>
-            <a:picLocks noChangeAspect="1"/>
-          </p:cNvPicPr>
-          <p:nvPr/>
-        </p:nvPicPr>
-        <p:blipFill>
-          <a:blip r:embed="rId5"/>
-          <a:stretch>
-            <a:fillRect/>
-          </a:stretch>
-        </p:blipFill>
-        <p:spPr>
-          <a:xfrm>
-            <a:off x="6191659" y="1646867"/>
-            <a:ext cx="2602494" cy="2646268"/>
-          </a:xfrm>
-          <a:prstGeom prst="rect">
-            <a:avLst/>
-          </a:prstGeom>
-        </p:spPr>
-      </p:pic>
-      <p:pic>
-        <p:nvPicPr>
           <p:cNvPr id="1026" name="Picture 2">
             <a:extLst>
               <a:ext uri="{FF2B5EF4-FFF2-40B4-BE49-F238E27FC236}">
@@ -20439,7 +20386,7 @@
           <p:nvPr/>
         </p:nvPicPr>
         <p:blipFill rotWithShape="1">
-          <a:blip r:embed="rId6">
+          <a:blip r:embed="rId4">
             <a:extLst>
               <a:ext uri="{28A0092B-C50C-407E-A947-70E740481C1C}">
                 <a14:useLocalDpi xmlns:a14="http://schemas.microsoft.com/office/drawing/2010/main" val="0"/>
@@ -20467,6 +20414,66 @@
               </a14:hiddenFill>
             </a:ext>
           </a:extLst>
+        </p:spPr>
+      </p:pic>
+      <p:pic>
+        <p:nvPicPr>
+          <p:cNvPr id="38" name="Рисунок 37">
+            <a:extLst>
+              <a:ext uri="{FF2B5EF4-FFF2-40B4-BE49-F238E27FC236}">
+                <a16:creationId xmlns:a16="http://schemas.microsoft.com/office/drawing/2014/main" id="{DD09316F-0F03-5B86-CB86-7E5FBDEBD873}"/>
+              </a:ext>
+            </a:extLst>
+          </p:cNvPr>
+          <p:cNvPicPr>
+            <a:picLocks noChangeAspect="1"/>
+          </p:cNvPicPr>
+          <p:nvPr/>
+        </p:nvPicPr>
+        <p:blipFill>
+          <a:blip r:embed="rId5"/>
+          <a:stretch>
+            <a:fillRect/>
+          </a:stretch>
+        </p:blipFill>
+        <p:spPr>
+          <a:xfrm>
+            <a:off x="3612507" y="1652617"/>
+            <a:ext cx="2233889" cy="2665091"/>
+          </a:xfrm>
+          <a:prstGeom prst="rect">
+            <a:avLst/>
+          </a:prstGeom>
+        </p:spPr>
+      </p:pic>
+      <p:pic>
+        <p:nvPicPr>
+          <p:cNvPr id="41" name="Рисунок 40">
+            <a:extLst>
+              <a:ext uri="{FF2B5EF4-FFF2-40B4-BE49-F238E27FC236}">
+                <a16:creationId xmlns:a16="http://schemas.microsoft.com/office/drawing/2014/main" id="{31D1E5B0-4135-E310-3BBD-6EEB35B37FA8}"/>
+              </a:ext>
+            </a:extLst>
+          </p:cNvPr>
+          <p:cNvPicPr>
+            <a:picLocks noChangeAspect="1"/>
+          </p:cNvPicPr>
+          <p:nvPr/>
+        </p:nvPicPr>
+        <p:blipFill>
+          <a:blip r:embed="rId6"/>
+          <a:stretch>
+            <a:fillRect/>
+          </a:stretch>
+        </p:blipFill>
+        <p:spPr>
+          <a:xfrm>
+            <a:off x="6463259" y="1641899"/>
+            <a:ext cx="2045942" cy="2669121"/>
+          </a:xfrm>
+          <a:prstGeom prst="rect">
+            <a:avLst/>
+          </a:prstGeom>
         </p:spPr>
       </p:pic>
     </p:spTree>
@@ -33354,156 +33361,6 @@
                 <a:latin typeface="Arial"/>
               </a:rPr>
               <a:t>Протокол готов сразу после заседания, и каждое решение в нём можно проверить по исходной аудиозаписи</a:t>
-            </a:r>
-          </a:p>
-        </p:txBody>
-      </p:sp>
-      <p:sp>
-        <p:nvSpPr>
-          <p:cNvPr id="55" name="Прямоугольник: скругленные углы 54">
-            <a:extLst>
-              <a:ext uri="{FF2B5EF4-FFF2-40B4-BE49-F238E27FC236}">
-                <a16:creationId xmlns:a16="http://schemas.microsoft.com/office/drawing/2014/main" id="{44C5E6C2-4D12-D059-AC05-42D4D1E014B8}"/>
-              </a:ext>
-            </a:extLst>
-          </p:cNvPr>
-          <p:cNvSpPr/>
-          <p:nvPr/>
-        </p:nvSpPr>
-        <p:spPr>
-          <a:xfrm>
-            <a:off x="609600" y="6019800"/>
-            <a:ext cx="10972800" cy="482600"/>
-          </a:xfrm>
-          <a:prstGeom prst="roundRect">
-            <a:avLst>
-              <a:gd name="adj" fmla="val 50000"/>
-            </a:avLst>
-          </a:prstGeom>
-          <a:solidFill>
-            <a:srgbClr val="E6F6F1"/>
-          </a:solidFill>
-          <a:ln w="19050" cap="flat" cmpd="sng" algn="ctr">
-            <a:noFill/>
-            <a:prstDash val="solid"/>
-            <a:miter lim="800000"/>
-          </a:ln>
-          <a:effectLst/>
-          <a:extLst>
-            <a:ext uri="{91240B29-F687-4F45-9708-019B960494DF}">
-              <a14:hiddenLine xmlns:a14="http://schemas.microsoft.com/office/drawing/2010/main" w="19050" cap="flat" cmpd="sng" algn="ctr">
-                <a:solidFill>
-                  <a:schemeClr val="accent1">
-                    <a:shade val="15000"/>
-                  </a:schemeClr>
-                </a:solidFill>
-                <a:prstDash val="solid"/>
-                <a:miter lim="800000"/>
-              </a14:hiddenLine>
-            </a:ext>
-          </a:extLst>
-        </p:spPr>
-        <p:style>
-          <a:lnRef idx="2">
-            <a:schemeClr val="accent1">
-              <a:shade val="15000"/>
-            </a:schemeClr>
-          </a:lnRef>
-          <a:fillRef idx="1">
-            <a:schemeClr val="accent1"/>
-          </a:fillRef>
-          <a:effectRef idx="0">
-            <a:schemeClr val="accent1"/>
-          </a:effectRef>
-          <a:fontRef idx="minor">
-            <a:schemeClr val="lt1"/>
-          </a:fontRef>
-        </p:style>
-        <p:txBody>
-          <a:bodyPr rtlCol="0" anchor="ctr"/>
-          <a:lstStyle/>
-          <a:p>
-            <a:pPr algn="ctr"/>
-            <a:endParaRPr lang="ru-RU"/>
-          </a:p>
-        </p:txBody>
-      </p:sp>
-      <p:sp>
-        <p:nvSpPr>
-          <p:cNvPr id="56" name="TextBox 55">
-            <a:extLst>
-              <a:ext uri="{FF2B5EF4-FFF2-40B4-BE49-F238E27FC236}">
-                <a16:creationId xmlns:a16="http://schemas.microsoft.com/office/drawing/2014/main" id="{8B2AAEE4-CB38-F17F-230C-AB3D928E8D90}"/>
-              </a:ext>
-            </a:extLst>
-          </p:cNvPr>
-          <p:cNvSpPr txBox="1"/>
-          <p:nvPr/>
-        </p:nvSpPr>
-        <p:spPr>
-          <a:xfrm>
-            <a:off x="838200" y="6172200"/>
-            <a:ext cx="1143000" cy="177800"/>
-          </a:xfrm>
-          <a:prstGeom prst="rect">
-            <a:avLst/>
-          </a:prstGeom>
-          <a:noFill/>
-        </p:spPr>
-        <p:txBody>
-          <a:bodyPr vert="horz" wrap="square" lIns="0" tIns="0" rIns="0" bIns="0" rtlCol="0" anchor="t">
-            <a:noAutofit/>
-          </a:bodyPr>
-          <a:lstStyle/>
-          <a:p>
-            <a:r>
-              <a:rPr lang="ru-RU" sz="900" b="1" spc="100">
-                <a:solidFill>
-                  <a:srgbClr val="22A889"/>
-                </a:solidFill>
-                <a:latin typeface="Arial" panose="020B0604020202020204" pitchFamily="34" charset="0"/>
-              </a:rPr>
-              <a:t>ПОДСКАЗКА</a:t>
-            </a:r>
-          </a:p>
-        </p:txBody>
-      </p:sp>
-      <p:sp>
-        <p:nvSpPr>
-          <p:cNvPr id="57" name="TextBox 56">
-            <a:extLst>
-              <a:ext uri="{FF2B5EF4-FFF2-40B4-BE49-F238E27FC236}">
-                <a16:creationId xmlns:a16="http://schemas.microsoft.com/office/drawing/2014/main" id="{EFF0121C-E706-511D-9A33-8F596DFE5809}"/>
-              </a:ext>
-            </a:extLst>
-          </p:cNvPr>
-          <p:cNvSpPr txBox="1"/>
-          <p:nvPr/>
-        </p:nvSpPr>
-        <p:spPr>
-          <a:xfrm>
-            <a:off x="2006600" y="6134100"/>
-            <a:ext cx="9398000" cy="254000"/>
-          </a:xfrm>
-          <a:prstGeom prst="rect">
-            <a:avLst/>
-          </a:prstGeom>
-          <a:noFill/>
-        </p:spPr>
-        <p:txBody>
-          <a:bodyPr vert="horz" wrap="square" lIns="0" tIns="0" rIns="0" bIns="0" rtlCol="0" anchor="ctr">
-            <a:noAutofit/>
-          </a:bodyPr>
-          <a:lstStyle/>
-          <a:p>
-            <a:r>
-              <a:rPr lang="ru-RU" sz="1150">
-                <a:solidFill>
-                  <a:srgbClr val="35425F"/>
-                </a:solidFill>
-                <a:latin typeface="Arial" panose="020B0604020202020204" pitchFamily="34" charset="0"/>
-              </a:rPr>
-              <a:t>Покажите измеримую пользу для пользователя. Если измерений ещё нет — оставьте поле пустым, не выдумывайте цифры.</a:t>
             </a:r>
           </a:p>
         </p:txBody>
